--- a/src/spikes/004-pdf-pptx-conversion/samples/sample-presentation.pptx
+++ b/src/spikes/004-pdf-pptx-conversion/samples/sample-presentation.pptx
@@ -10,6 +10,9 @@
     <p:sldId id="258" r:id="rId10"/>
     <p:sldId id="259" r:id="rId11"/>
     <p:sldId id="260" r:id="rId12"/>
+    <p:sldId id="261" r:id="rId13"/>
+    <p:sldId id="262" r:id="rId14"/>
+    <p:sldId id="263" r:id="rId15"/>
   </p:sldIdLst>
   <p:sldSz cx="12191695" cy="6858000" type="screen4x3"/>
   <p:notesSz cx="6858000" cy="9144000"/>
@@ -787,6 +790,216 @@
           <a:p>
             <a:r>
               <a:t>Performance chart shows that MarkItDown is 10x faster than cloud-based alternatives for text extraction. Image description time is the same across all backends since they all use GPT-4.1 vision.</a:t>
+            </a:r>
+          </a:p>
+        </p:txBody>
+      </p:sp>
+      <p:sp>
+        <p:nvSpPr>
+          <p:cNvPr id="4" name="Slide Number Placeholder 3"/>
+          <p:cNvSpPr>
+            <a:spLocks noGrp="1"/>
+          </p:cNvSpPr>
+          <p:nvPr>
+            <p:ph type="sldNum" idx="5" sz="quarter"/>
+          </p:nvPr>
+        </p:nvSpPr>
+        <p:spPr/>
+      </p:sp>
+    </p:spTree>
+  </p:cSld>
+  <p:clrMapOvr>
+    <a:masterClrMapping/>
+  </p:clrMapOvr>
+</p:notes>
+</file>
+
+<file path=ppt/notesSlides/notesSlide6.xml><?xml version="1.0" encoding="utf-8"?>
+<p:notes xmlns:a="http://schemas.openxmlformats.org/drawingml/2006/main" xmlns:p="http://schemas.openxmlformats.org/presentationml/2006/main" xmlns:r="http://schemas.openxmlformats.org/officeDocument/2006/relationships">
+  <p:cSld>
+    <p:spTree>
+      <p:nvGrpSpPr>
+        <p:cNvPr id="1" name=""/>
+        <p:cNvGrpSpPr/>
+        <p:nvPr/>
+      </p:nvGrpSpPr>
+      <p:grpSpPr>
+        <a:xfrm>
+          <a:off x="0" y="0"/>
+          <a:ext cx="0" cy="0"/>
+          <a:chOff x="0" y="0"/>
+          <a:chExt cx="0" cy="0"/>
+        </a:xfrm>
+      </p:grpSpPr>
+      <p:sp>
+        <p:nvSpPr>
+          <p:cNvPr id="2" name="Slide Image Placeholder 1"/>
+          <p:cNvSpPr>
+            <a:spLocks noGrp="1"/>
+          </p:cNvSpPr>
+          <p:nvPr>
+            <p:ph type="sldImg" idx="2"/>
+          </p:nvPr>
+        </p:nvSpPr>
+        <p:spPr/>
+      </p:sp>
+      <p:sp>
+        <p:nvSpPr>
+          <p:cNvPr id="3" name="Notes Placeholder 2"/>
+          <p:cNvSpPr>
+            <a:spLocks noGrp="1"/>
+          </p:cNvSpPr>
+          <p:nvPr>
+            <p:ph type="body" idx="3" sz="quarter"/>
+          </p:nvPr>
+        </p:nvSpPr>
+        <p:spPr/>
+        <p:txBody>
+          <a:bodyPr/>
+          <a:lstStyle/>
+          <a:p>
+            <a:r>
+              <a:t>This slide tests extraction of a photo-like image with complex color gradients and organic shapes. The image simulates a landscape photograph to verify that color fidelity and detail are preserved during extraction.</a:t>
+            </a:r>
+          </a:p>
+        </p:txBody>
+      </p:sp>
+      <p:sp>
+        <p:nvSpPr>
+          <p:cNvPr id="4" name="Slide Number Placeholder 3"/>
+          <p:cNvSpPr>
+            <a:spLocks noGrp="1"/>
+          </p:cNvSpPr>
+          <p:nvPr>
+            <p:ph type="sldNum" idx="5" sz="quarter"/>
+          </p:nvPr>
+        </p:nvSpPr>
+        <p:spPr/>
+      </p:sp>
+    </p:spTree>
+  </p:cSld>
+  <p:clrMapOvr>
+    <a:masterClrMapping/>
+  </p:clrMapOvr>
+</p:notes>
+</file>
+
+<file path=ppt/notesSlides/notesSlide7.xml><?xml version="1.0" encoding="utf-8"?>
+<p:notes xmlns:a="http://schemas.openxmlformats.org/drawingml/2006/main" xmlns:p="http://schemas.openxmlformats.org/presentationml/2006/main" xmlns:r="http://schemas.openxmlformats.org/officeDocument/2006/relationships">
+  <p:cSld>
+    <p:spTree>
+      <p:nvGrpSpPr>
+        <p:cNvPr id="1" name=""/>
+        <p:cNvGrpSpPr/>
+        <p:nvPr/>
+      </p:nvGrpSpPr>
+      <p:grpSpPr>
+        <a:xfrm>
+          <a:off x="0" y="0"/>
+          <a:ext cx="0" cy="0"/>
+          <a:chOff x="0" y="0"/>
+          <a:chExt cx="0" cy="0"/>
+        </a:xfrm>
+      </p:grpSpPr>
+      <p:sp>
+        <p:nvSpPr>
+          <p:cNvPr id="2" name="Slide Image Placeholder 1"/>
+          <p:cNvSpPr>
+            <a:spLocks noGrp="1"/>
+          </p:cNvSpPr>
+          <p:nvPr>
+            <p:ph type="sldImg" idx="2"/>
+          </p:nvPr>
+        </p:nvSpPr>
+        <p:spPr/>
+      </p:sp>
+      <p:sp>
+        <p:nvSpPr>
+          <p:cNvPr id="3" name="Notes Placeholder 2"/>
+          <p:cNvSpPr>
+            <a:spLocks noGrp="1"/>
+          </p:cNvSpPr>
+          <p:nvPr>
+            <p:ph type="body" idx="3" sz="quarter"/>
+          </p:nvPr>
+        </p:nvSpPr>
+        <p:spPr/>
+        <p:txBody>
+          <a:bodyPr/>
+          <a:lstStyle/>
+          <a:p>
+            <a:r>
+              <a:t>This table has 30 data rows plus a header to test whether the converter handles large tables that might overflow a single slide. In a real presentation this table would typically be split across slides.</a:t>
+            </a:r>
+          </a:p>
+        </p:txBody>
+      </p:sp>
+      <p:sp>
+        <p:nvSpPr>
+          <p:cNvPr id="4" name="Slide Number Placeholder 3"/>
+          <p:cNvSpPr>
+            <a:spLocks noGrp="1"/>
+          </p:cNvSpPr>
+          <p:nvPr>
+            <p:ph type="sldNum" idx="5" sz="quarter"/>
+          </p:nvPr>
+        </p:nvSpPr>
+        <p:spPr/>
+      </p:sp>
+    </p:spTree>
+  </p:cSld>
+  <p:clrMapOvr>
+    <a:masterClrMapping/>
+  </p:clrMapOvr>
+</p:notes>
+</file>
+
+<file path=ppt/notesSlides/notesSlide8.xml><?xml version="1.0" encoding="utf-8"?>
+<p:notes xmlns:a="http://schemas.openxmlformats.org/drawingml/2006/main" xmlns:p="http://schemas.openxmlformats.org/presentationml/2006/main" xmlns:r="http://schemas.openxmlformats.org/officeDocument/2006/relationships">
+  <p:cSld>
+    <p:spTree>
+      <p:nvGrpSpPr>
+        <p:cNvPr id="1" name=""/>
+        <p:cNvGrpSpPr/>
+        <p:nvPr/>
+      </p:nvGrpSpPr>
+      <p:grpSpPr>
+        <a:xfrm>
+          <a:off x="0" y="0"/>
+          <a:ext cx="0" cy="0"/>
+          <a:chOff x="0" y="0"/>
+          <a:chExt cx="0" cy="0"/>
+        </a:xfrm>
+      </p:grpSpPr>
+      <p:sp>
+        <p:nvSpPr>
+          <p:cNvPr id="2" name="Slide Image Placeholder 1"/>
+          <p:cNvSpPr>
+            <a:spLocks noGrp="1"/>
+          </p:cNvSpPr>
+          <p:nvPr>
+            <p:ph type="sldImg" idx="2"/>
+          </p:nvPr>
+        </p:nvSpPr>
+        <p:spPr/>
+      </p:sp>
+      <p:sp>
+        <p:nvSpPr>
+          <p:cNvPr id="3" name="Notes Placeholder 2"/>
+          <p:cNvSpPr>
+            <a:spLocks noGrp="1"/>
+          </p:cNvSpPr>
+          <p:nvPr>
+            <p:ph type="body" idx="3" sz="quarter"/>
+          </p:nvPr>
+        </p:nvSpPr>
+        <p:spPr/>
+        <p:txBody>
+          <a:bodyPr/>
+          <a:lstStyle/>
+          <a:p>
+            <a:r>
+              <a:t>Share these links with the team for further reading. The MarkItDown repository is the most relevant for this spike.</a:t>
             </a:r>
           </a:p>
         </p:txBody>
@@ -3927,6 +4140,18 @@
               <a:t>Azure Cosmos DB — conversation memory</a:t>
             </a:r>
           </a:p>
+          <a:p>
+            <a:pPr/>
+            <a:r>
+              <a:t>Documentation: </a:t>
+            </a:r>
+            <a:r>
+              <a:rPr>
+                <a:hlinkClick r:id="rId2"/>
+              </a:rPr>
+              <a:t>Azure AI Search docs</a:t>
+            </a:r>
+          </a:p>
         </p:txBody>
       </p:sp>
     </p:spTree>
@@ -4372,6 +4597,2723 @@
           </a:prstGeom>
         </p:spPr>
       </p:pic>
+    </p:spTree>
+  </p:cSld>
+  <p:clrMapOvr>
+    <a:masterClrMapping/>
+  </p:clrMapOvr>
+</p:sld>
+</file>
+
+<file path=ppt/slides/slide6.xml><?xml version="1.0" encoding="utf-8"?>
+<p:sld xmlns:a="http://schemas.openxmlformats.org/drawingml/2006/main" xmlns:p="http://schemas.openxmlformats.org/presentationml/2006/main" xmlns:r="http://schemas.openxmlformats.org/officeDocument/2006/relationships">
+  <p:cSld>
+    <p:spTree>
+      <p:nvGrpSpPr>
+        <p:cNvPr id="1" name=""/>
+        <p:cNvGrpSpPr/>
+        <p:nvPr/>
+      </p:nvGrpSpPr>
+      <p:grpSpPr/>
+      <p:sp>
+        <p:nvSpPr>
+          <p:cNvPr id="2" name="Title 1"/>
+          <p:cNvSpPr>
+            <a:spLocks noGrp="1"/>
+          </p:cNvSpPr>
+          <p:nvPr>
+            <p:ph type="title"/>
+          </p:nvPr>
+        </p:nvSpPr>
+        <p:spPr/>
+        <p:txBody>
+          <a:bodyPr/>
+          <a:lstStyle/>
+          <a:p>
+            <a:r>
+              <a:t>Photo Extraction Test</a:t>
+            </a:r>
+          </a:p>
+        </p:txBody>
+      </p:sp>
+      <p:pic>
+        <p:nvPicPr>
+          <p:cNvPr id="3" name="Picture 2" descr="slide-photo.png"/>
+          <p:cNvPicPr>
+            <a:picLocks noChangeAspect="1"/>
+          </p:cNvPicPr>
+          <p:nvPr/>
+        </p:nvPicPr>
+        <p:blipFill>
+          <a:blip r:embed="rId2"/>
+          <a:stretch>
+            <a:fillRect/>
+          </a:stretch>
+        </p:blipFill>
+        <p:spPr>
+          <a:xfrm>
+            <a:off x="2743200" y="1371600"/>
+            <a:ext cx="6400800" cy="4572000"/>
+          </a:xfrm>
+          <a:prstGeom prst="rect">
+            <a:avLst/>
+          </a:prstGeom>
+        </p:spPr>
+      </p:pic>
+    </p:spTree>
+  </p:cSld>
+  <p:clrMapOvr>
+    <a:masterClrMapping/>
+  </p:clrMapOvr>
+</p:sld>
+</file>
+
+<file path=ppt/slides/slide7.xml><?xml version="1.0" encoding="utf-8"?>
+<p:sld xmlns:a="http://schemas.openxmlformats.org/drawingml/2006/main" xmlns:p="http://schemas.openxmlformats.org/presentationml/2006/main" xmlns:r="http://schemas.openxmlformats.org/officeDocument/2006/relationships">
+  <p:cSld>
+    <p:spTree>
+      <p:nvGrpSpPr>
+        <p:cNvPr id="1" name=""/>
+        <p:cNvGrpSpPr/>
+        <p:nvPr/>
+      </p:nvGrpSpPr>
+      <p:grpSpPr/>
+      <p:sp>
+        <p:nvSpPr>
+          <p:cNvPr id="2" name="Title 1"/>
+          <p:cNvSpPr>
+            <a:spLocks noGrp="1"/>
+          </p:cNvSpPr>
+          <p:nvPr>
+            <p:ph type="title"/>
+          </p:nvPr>
+        </p:nvSpPr>
+        <p:spPr/>
+        <p:txBody>
+          <a:bodyPr/>
+          <a:lstStyle/>
+          <a:p>
+            <a:r>
+              <a:t>Azure Resource Inventory (Long Table)</a:t>
+            </a:r>
+          </a:p>
+        </p:txBody>
+      </p:sp>
+      <p:graphicFrame>
+        <p:nvGraphicFramePr>
+          <p:cNvPr id="3" name="Table 2"/>
+          <p:cNvGraphicFramePr>
+            <a:graphicFrameLocks noGrp="1"/>
+          </p:cNvGraphicFramePr>
+          <p:nvPr/>
+        </p:nvGraphicFramePr>
+        <p:xfrm>
+          <a:off x="274320" y="1097280"/>
+          <a:ext cx="11612880" cy="5303520"/>
+        </p:xfrm>
+        <a:graphic>
+          <a:graphicData uri="http://schemas.openxmlformats.org/drawingml/2006/table">
+            <a:tbl>
+              <a:tblPr firstRow="1" bandRow="1">
+                <a:tableStyleId>{5C22544A-7EE6-4342-B048-85BDC9FD1C3A}</a:tableStyleId>
+              </a:tblPr>
+              <a:tblGrid>
+                <a:gridCol w="1935480"/>
+                <a:gridCol w="1935480"/>
+                <a:gridCol w="1935480"/>
+                <a:gridCol w="1935480"/>
+                <a:gridCol w="1935480"/>
+                <a:gridCol w="1935480"/>
+              </a:tblGrid>
+              <a:tr h="171081">
+                <a:tc>
+                  <a:txBody>
+                    <a:bodyPr/>
+                    <a:lstStyle/>
+                    <a:p>
+                      <a:r>
+                        <a:rPr sz="700"/>
+                        <a:t>#</a:t>
+                      </a:r>
+                    </a:p>
+                  </a:txBody>
+                  <a:tcPr/>
+                </a:tc>
+                <a:tc>
+                  <a:txBody>
+                    <a:bodyPr/>
+                    <a:lstStyle/>
+                    <a:p>
+                      <a:r>
+                        <a:rPr sz="700"/>
+                        <a:t>Resource Name</a:t>
+                      </a:r>
+                    </a:p>
+                  </a:txBody>
+                  <a:tcPr/>
+                </a:tc>
+                <a:tc>
+                  <a:txBody>
+                    <a:bodyPr/>
+                    <a:lstStyle/>
+                    <a:p>
+                      <a:r>
+                        <a:rPr sz="700"/>
+                        <a:t>Type</a:t>
+                      </a:r>
+                    </a:p>
+                  </a:txBody>
+                  <a:tcPr/>
+                </a:tc>
+                <a:tc>
+                  <a:txBody>
+                    <a:bodyPr/>
+                    <a:lstStyle/>
+                    <a:p>
+                      <a:r>
+                        <a:rPr sz="700"/>
+                        <a:t>Region</a:t>
+                      </a:r>
+                    </a:p>
+                  </a:txBody>
+                  <a:tcPr/>
+                </a:tc>
+                <a:tc>
+                  <a:txBody>
+                    <a:bodyPr/>
+                    <a:lstStyle/>
+                    <a:p>
+                      <a:r>
+                        <a:rPr sz="700"/>
+                        <a:t>Status</a:t>
+                      </a:r>
+                    </a:p>
+                  </a:txBody>
+                  <a:tcPr/>
+                </a:tc>
+                <a:tc>
+                  <a:txBody>
+                    <a:bodyPr/>
+                    <a:lstStyle/>
+                    <a:p>
+                      <a:r>
+                        <a:rPr sz="700"/>
+                        <a:t>Monthly Cost</a:t>
+                      </a:r>
+                    </a:p>
+                  </a:txBody>
+                  <a:tcPr/>
+                </a:tc>
+              </a:tr>
+              <a:tr h="171081">
+                <a:tc>
+                  <a:txBody>
+                    <a:bodyPr/>
+                    <a:lstStyle/>
+                    <a:p>
+                      <a:r>
+                        <a:rPr sz="700"/>
+                        <a:t>1</a:t>
+                      </a:r>
+                    </a:p>
+                  </a:txBody>
+                  <a:tcPr/>
+                </a:tc>
+                <a:tc>
+                  <a:txBody>
+                    <a:bodyPr/>
+                    <a:lstStyle/>
+                    <a:p>
+                      <a:r>
+                        <a:rPr sz="700"/>
+                        <a:t>kb-agent-container-app-01</a:t>
+                      </a:r>
+                    </a:p>
+                  </a:txBody>
+                  <a:tcPr/>
+                </a:tc>
+                <a:tc>
+                  <a:txBody>
+                    <a:bodyPr/>
+                    <a:lstStyle/>
+                    <a:p>
+                      <a:r>
+                        <a:rPr sz="700"/>
+                        <a:t>Container App</a:t>
+                      </a:r>
+                    </a:p>
+                  </a:txBody>
+                  <a:tcPr/>
+                </a:tc>
+                <a:tc>
+                  <a:txBody>
+                    <a:bodyPr/>
+                    <a:lstStyle/>
+                    <a:p>
+                      <a:r>
+                        <a:rPr sz="700"/>
+                        <a:t>East US 2</a:t>
+                      </a:r>
+                    </a:p>
+                  </a:txBody>
+                  <a:tcPr/>
+                </a:tc>
+                <a:tc>
+                  <a:txBody>
+                    <a:bodyPr/>
+                    <a:lstStyle/>
+                    <a:p>
+                      <a:r>
+                        <a:rPr sz="700"/>
+                        <a:t>Running</a:t>
+                      </a:r>
+                    </a:p>
+                  </a:txBody>
+                  <a:tcPr/>
+                </a:tc>
+                <a:tc>
+                  <a:txBody>
+                    <a:bodyPr/>
+                    <a:lstStyle/>
+                    <a:p>
+                      <a:r>
+                        <a:rPr sz="700"/>
+                        <a:t>$45.00</a:t>
+                      </a:r>
+                    </a:p>
+                  </a:txBody>
+                  <a:tcPr/>
+                </a:tc>
+              </a:tr>
+              <a:tr h="171081">
+                <a:tc>
+                  <a:txBody>
+                    <a:bodyPr/>
+                    <a:lstStyle/>
+                    <a:p>
+                      <a:r>
+                        <a:rPr sz="700"/>
+                        <a:t>2</a:t>
+                      </a:r>
+                    </a:p>
+                  </a:txBody>
+                  <a:tcPr/>
+                </a:tc>
+                <a:tc>
+                  <a:txBody>
+                    <a:bodyPr/>
+                    <a:lstStyle/>
+                    <a:p>
+                      <a:r>
+                        <a:rPr sz="700"/>
+                        <a:t>kb-agent-cosmos-db-02</a:t>
+                      </a:r>
+                    </a:p>
+                  </a:txBody>
+                  <a:tcPr/>
+                </a:tc>
+                <a:tc>
+                  <a:txBody>
+                    <a:bodyPr/>
+                    <a:lstStyle/>
+                    <a:p>
+                      <a:r>
+                        <a:rPr sz="700"/>
+                        <a:t>Cosmos DB</a:t>
+                      </a:r>
+                    </a:p>
+                  </a:txBody>
+                  <a:tcPr/>
+                </a:tc>
+                <a:tc>
+                  <a:txBody>
+                    <a:bodyPr/>
+                    <a:lstStyle/>
+                    <a:p>
+                      <a:r>
+                        <a:rPr sz="700"/>
+                        <a:t>West US 3</a:t>
+                      </a:r>
+                    </a:p>
+                  </a:txBody>
+                  <a:tcPr/>
+                </a:tc>
+                <a:tc>
+                  <a:txBody>
+                    <a:bodyPr/>
+                    <a:lstStyle/>
+                    <a:p>
+                      <a:r>
+                        <a:rPr sz="700"/>
+                        <a:t>Provisioned</a:t>
+                      </a:r>
+                    </a:p>
+                  </a:txBody>
+                  <a:tcPr/>
+                </a:tc>
+                <a:tc>
+                  <a:txBody>
+                    <a:bodyPr/>
+                    <a:lstStyle/>
+                    <a:p>
+                      <a:r>
+                        <a:rPr sz="700"/>
+                        <a:t>$120.50</a:t>
+                      </a:r>
+                    </a:p>
+                  </a:txBody>
+                  <a:tcPr/>
+                </a:tc>
+              </a:tr>
+              <a:tr h="171081">
+                <a:tc>
+                  <a:txBody>
+                    <a:bodyPr/>
+                    <a:lstStyle/>
+                    <a:p>
+                      <a:r>
+                        <a:rPr sz="700"/>
+                        <a:t>3</a:t>
+                      </a:r>
+                    </a:p>
+                  </a:txBody>
+                  <a:tcPr/>
+                </a:tc>
+                <a:tc>
+                  <a:txBody>
+                    <a:bodyPr/>
+                    <a:lstStyle/>
+                    <a:p>
+                      <a:r>
+                        <a:rPr sz="700"/>
+                        <a:t>kb-agent-ai-search-03</a:t>
+                      </a:r>
+                    </a:p>
+                  </a:txBody>
+                  <a:tcPr/>
+                </a:tc>
+                <a:tc>
+                  <a:txBody>
+                    <a:bodyPr/>
+                    <a:lstStyle/>
+                    <a:p>
+                      <a:r>
+                        <a:rPr sz="700"/>
+                        <a:t>AI Search</a:t>
+                      </a:r>
+                    </a:p>
+                  </a:txBody>
+                  <a:tcPr/>
+                </a:tc>
+                <a:tc>
+                  <a:txBody>
+                    <a:bodyPr/>
+                    <a:lstStyle/>
+                    <a:p>
+                      <a:r>
+                        <a:rPr sz="700"/>
+                        <a:t>Central US</a:t>
+                      </a:r>
+                    </a:p>
+                  </a:txBody>
+                  <a:tcPr/>
+                </a:tc>
+                <a:tc>
+                  <a:txBody>
+                    <a:bodyPr/>
+                    <a:lstStyle/>
+                    <a:p>
+                      <a:r>
+                        <a:rPr sz="700"/>
+                        <a:t>Scaling</a:t>
+                      </a:r>
+                    </a:p>
+                  </a:txBody>
+                  <a:tcPr/>
+                </a:tc>
+                <a:tc>
+                  <a:txBody>
+                    <a:bodyPr/>
+                    <a:lstStyle/>
+                    <a:p>
+                      <a:r>
+                        <a:rPr sz="700"/>
+                        <a:t>$89.99</a:t>
+                      </a:r>
+                    </a:p>
+                  </a:txBody>
+                  <a:tcPr/>
+                </a:tc>
+              </a:tr>
+              <a:tr h="171081">
+                <a:tc>
+                  <a:txBody>
+                    <a:bodyPr/>
+                    <a:lstStyle/>
+                    <a:p>
+                      <a:r>
+                        <a:rPr sz="700"/>
+                        <a:t>4</a:t>
+                      </a:r>
+                    </a:p>
+                  </a:txBody>
+                  <a:tcPr/>
+                </a:tc>
+                <a:tc>
+                  <a:txBody>
+                    <a:bodyPr/>
+                    <a:lstStyle/>
+                    <a:p>
+                      <a:r>
+                        <a:rPr sz="700"/>
+                        <a:t>kb-agent-openai-04</a:t>
+                      </a:r>
+                    </a:p>
+                  </a:txBody>
+                  <a:tcPr/>
+                </a:tc>
+                <a:tc>
+                  <a:txBody>
+                    <a:bodyPr/>
+                    <a:lstStyle/>
+                    <a:p>
+                      <a:r>
+                        <a:rPr sz="700"/>
+                        <a:t>OpenAI</a:t>
+                      </a:r>
+                    </a:p>
+                  </a:txBody>
+                  <a:tcPr/>
+                </a:tc>
+                <a:tc>
+                  <a:txBody>
+                    <a:bodyPr/>
+                    <a:lstStyle/>
+                    <a:p>
+                      <a:r>
+                        <a:rPr sz="700"/>
+                        <a:t>North Europe</a:t>
+                      </a:r>
+                    </a:p>
+                  </a:txBody>
+                  <a:tcPr/>
+                </a:tc>
+                <a:tc>
+                  <a:txBody>
+                    <a:bodyPr/>
+                    <a:lstStyle/>
+                    <a:p>
+                      <a:r>
+                        <a:rPr sz="700"/>
+                        <a:t>Updating</a:t>
+                      </a:r>
+                    </a:p>
+                  </a:txBody>
+                  <a:tcPr/>
+                </a:tc>
+                <a:tc>
+                  <a:txBody>
+                    <a:bodyPr/>
+                    <a:lstStyle/>
+                    <a:p>
+                      <a:r>
+                        <a:rPr sz="700"/>
+                        <a:t>$210.00</a:t>
+                      </a:r>
+                    </a:p>
+                  </a:txBody>
+                  <a:tcPr/>
+                </a:tc>
+              </a:tr>
+              <a:tr h="171081">
+                <a:tc>
+                  <a:txBody>
+                    <a:bodyPr/>
+                    <a:lstStyle/>
+                    <a:p>
+                      <a:r>
+                        <a:rPr sz="700"/>
+                        <a:t>5</a:t>
+                      </a:r>
+                    </a:p>
+                  </a:txBody>
+                  <a:tcPr/>
+                </a:tc>
+                <a:tc>
+                  <a:txBody>
+                    <a:bodyPr/>
+                    <a:lstStyle/>
+                    <a:p>
+                      <a:r>
+                        <a:rPr sz="700"/>
+                        <a:t>kb-agent-blob-storage-05</a:t>
+                      </a:r>
+                    </a:p>
+                  </a:txBody>
+                  <a:tcPr/>
+                </a:tc>
+                <a:tc>
+                  <a:txBody>
+                    <a:bodyPr/>
+                    <a:lstStyle/>
+                    <a:p>
+                      <a:r>
+                        <a:rPr sz="700"/>
+                        <a:t>Blob Storage</a:t>
+                      </a:r>
+                    </a:p>
+                  </a:txBody>
+                  <a:tcPr/>
+                </a:tc>
+                <a:tc>
+                  <a:txBody>
+                    <a:bodyPr/>
+                    <a:lstStyle/>
+                    <a:p>
+                      <a:r>
+                        <a:rPr sz="700"/>
+                        <a:t>West Europe</a:t>
+                      </a:r>
+                    </a:p>
+                  </a:txBody>
+                  <a:tcPr/>
+                </a:tc>
+                <a:tc>
+                  <a:txBody>
+                    <a:bodyPr/>
+                    <a:lstStyle/>
+                    <a:p>
+                      <a:r>
+                        <a:rPr sz="700"/>
+                        <a:t>Healthy</a:t>
+                      </a:r>
+                    </a:p>
+                  </a:txBody>
+                  <a:tcPr/>
+                </a:tc>
+                <a:tc>
+                  <a:txBody>
+                    <a:bodyPr/>
+                    <a:lstStyle/>
+                    <a:p>
+                      <a:r>
+                        <a:rPr sz="700"/>
+                        <a:t>$15.75</a:t>
+                      </a:r>
+                    </a:p>
+                  </a:txBody>
+                  <a:tcPr/>
+                </a:tc>
+              </a:tr>
+              <a:tr h="171081">
+                <a:tc>
+                  <a:txBody>
+                    <a:bodyPr/>
+                    <a:lstStyle/>
+                    <a:p>
+                      <a:r>
+                        <a:rPr sz="700"/>
+                        <a:t>6</a:t>
+                      </a:r>
+                    </a:p>
+                  </a:txBody>
+                  <a:tcPr/>
+                </a:tc>
+                <a:tc>
+                  <a:txBody>
+                    <a:bodyPr/>
+                    <a:lstStyle/>
+                    <a:p>
+                      <a:r>
+                        <a:rPr sz="700"/>
+                        <a:t>kb-agent-key-vault-06</a:t>
+                      </a:r>
+                    </a:p>
+                  </a:txBody>
+                  <a:tcPr/>
+                </a:tc>
+                <a:tc>
+                  <a:txBody>
+                    <a:bodyPr/>
+                    <a:lstStyle/>
+                    <a:p>
+                      <a:r>
+                        <a:rPr sz="700"/>
+                        <a:t>Key Vault</a:t>
+                      </a:r>
+                    </a:p>
+                  </a:txBody>
+                  <a:tcPr/>
+                </a:tc>
+                <a:tc>
+                  <a:txBody>
+                    <a:bodyPr/>
+                    <a:lstStyle/>
+                    <a:p>
+                      <a:r>
+                        <a:rPr sz="700"/>
+                        <a:t>East US 2</a:t>
+                      </a:r>
+                    </a:p>
+                  </a:txBody>
+                  <a:tcPr/>
+                </a:tc>
+                <a:tc>
+                  <a:txBody>
+                    <a:bodyPr/>
+                    <a:lstStyle/>
+                    <a:p>
+                      <a:r>
+                        <a:rPr sz="700"/>
+                        <a:t>Running</a:t>
+                      </a:r>
+                    </a:p>
+                  </a:txBody>
+                  <a:tcPr/>
+                </a:tc>
+                <a:tc>
+                  <a:txBody>
+                    <a:bodyPr/>
+                    <a:lstStyle/>
+                    <a:p>
+                      <a:r>
+                        <a:rPr sz="700"/>
+                        <a:t>$32.40</a:t>
+                      </a:r>
+                    </a:p>
+                  </a:txBody>
+                  <a:tcPr/>
+                </a:tc>
+              </a:tr>
+              <a:tr h="171081">
+                <a:tc>
+                  <a:txBody>
+                    <a:bodyPr/>
+                    <a:lstStyle/>
+                    <a:p>
+                      <a:r>
+                        <a:rPr sz="700"/>
+                        <a:t>7</a:t>
+                      </a:r>
+                    </a:p>
+                  </a:txBody>
+                  <a:tcPr/>
+                </a:tc>
+                <a:tc>
+                  <a:txBody>
+                    <a:bodyPr/>
+                    <a:lstStyle/>
+                    <a:p>
+                      <a:r>
+                        <a:rPr sz="700"/>
+                        <a:t>kb-agent-app-insights-07</a:t>
+                      </a:r>
+                    </a:p>
+                  </a:txBody>
+                  <a:tcPr/>
+                </a:tc>
+                <a:tc>
+                  <a:txBody>
+                    <a:bodyPr/>
+                    <a:lstStyle/>
+                    <a:p>
+                      <a:r>
+                        <a:rPr sz="700"/>
+                        <a:t>App Insights</a:t>
+                      </a:r>
+                    </a:p>
+                  </a:txBody>
+                  <a:tcPr/>
+                </a:tc>
+                <a:tc>
+                  <a:txBody>
+                    <a:bodyPr/>
+                    <a:lstStyle/>
+                    <a:p>
+                      <a:r>
+                        <a:rPr sz="700"/>
+                        <a:t>West US 3</a:t>
+                      </a:r>
+                    </a:p>
+                  </a:txBody>
+                  <a:tcPr/>
+                </a:tc>
+                <a:tc>
+                  <a:txBody>
+                    <a:bodyPr/>
+                    <a:lstStyle/>
+                    <a:p>
+                      <a:r>
+                        <a:rPr sz="700"/>
+                        <a:t>Provisioned</a:t>
+                      </a:r>
+                    </a:p>
+                  </a:txBody>
+                  <a:tcPr/>
+                </a:tc>
+                <a:tc>
+                  <a:txBody>
+                    <a:bodyPr/>
+                    <a:lstStyle/>
+                    <a:p>
+                      <a:r>
+                        <a:rPr sz="700"/>
+                        <a:t>$8.50</a:t>
+                      </a:r>
+                    </a:p>
+                  </a:txBody>
+                  <a:tcPr/>
+                </a:tc>
+              </a:tr>
+              <a:tr h="171081">
+                <a:tc>
+                  <a:txBody>
+                    <a:bodyPr/>
+                    <a:lstStyle/>
+                    <a:p>
+                      <a:r>
+                        <a:rPr sz="700"/>
+                        <a:t>8</a:t>
+                      </a:r>
+                    </a:p>
+                  </a:txBody>
+                  <a:tcPr/>
+                </a:tc>
+                <a:tc>
+                  <a:txBody>
+                    <a:bodyPr/>
+                    <a:lstStyle/>
+                    <a:p>
+                      <a:r>
+                        <a:rPr sz="700"/>
+                        <a:t>kb-agent-log-analytics-08</a:t>
+                      </a:r>
+                    </a:p>
+                  </a:txBody>
+                  <a:tcPr/>
+                </a:tc>
+                <a:tc>
+                  <a:txBody>
+                    <a:bodyPr/>
+                    <a:lstStyle/>
+                    <a:p>
+                      <a:r>
+                        <a:rPr sz="700"/>
+                        <a:t>Log Analytics</a:t>
+                      </a:r>
+                    </a:p>
+                  </a:txBody>
+                  <a:tcPr/>
+                </a:tc>
+                <a:tc>
+                  <a:txBody>
+                    <a:bodyPr/>
+                    <a:lstStyle/>
+                    <a:p>
+                      <a:r>
+                        <a:rPr sz="700"/>
+                        <a:t>Central US</a:t>
+                      </a:r>
+                    </a:p>
+                  </a:txBody>
+                  <a:tcPr/>
+                </a:tc>
+                <a:tc>
+                  <a:txBody>
+                    <a:bodyPr/>
+                    <a:lstStyle/>
+                    <a:p>
+                      <a:r>
+                        <a:rPr sz="700"/>
+                        <a:t>Scaling</a:t>
+                      </a:r>
+                    </a:p>
+                  </a:txBody>
+                  <a:tcPr/>
+                </a:tc>
+                <a:tc>
+                  <a:txBody>
+                    <a:bodyPr/>
+                    <a:lstStyle/>
+                    <a:p>
+                      <a:r>
+                        <a:rPr sz="700"/>
+                        <a:t>$55.20</a:t>
+                      </a:r>
+                    </a:p>
+                  </a:txBody>
+                  <a:tcPr/>
+                </a:tc>
+              </a:tr>
+              <a:tr h="171081">
+                <a:tc>
+                  <a:txBody>
+                    <a:bodyPr/>
+                    <a:lstStyle/>
+                    <a:p>
+                      <a:r>
+                        <a:rPr sz="700"/>
+                        <a:t>9</a:t>
+                      </a:r>
+                    </a:p>
+                  </a:txBody>
+                  <a:tcPr/>
+                </a:tc>
+                <a:tc>
+                  <a:txBody>
+                    <a:bodyPr/>
+                    <a:lstStyle/>
+                    <a:p>
+                      <a:r>
+                        <a:rPr sz="700"/>
+                        <a:t>kb-agent-container-registry-09</a:t>
+                      </a:r>
+                    </a:p>
+                  </a:txBody>
+                  <a:tcPr/>
+                </a:tc>
+                <a:tc>
+                  <a:txBody>
+                    <a:bodyPr/>
+                    <a:lstStyle/>
+                    <a:p>
+                      <a:r>
+                        <a:rPr sz="700"/>
+                        <a:t>Container Registry</a:t>
+                      </a:r>
+                    </a:p>
+                  </a:txBody>
+                  <a:tcPr/>
+                </a:tc>
+                <a:tc>
+                  <a:txBody>
+                    <a:bodyPr/>
+                    <a:lstStyle/>
+                    <a:p>
+                      <a:r>
+                        <a:rPr sz="700"/>
+                        <a:t>North Europe</a:t>
+                      </a:r>
+                    </a:p>
+                  </a:txBody>
+                  <a:tcPr/>
+                </a:tc>
+                <a:tc>
+                  <a:txBody>
+                    <a:bodyPr/>
+                    <a:lstStyle/>
+                    <a:p>
+                      <a:r>
+                        <a:rPr sz="700"/>
+                        <a:t>Updating</a:t>
+                      </a:r>
+                    </a:p>
+                  </a:txBody>
+                  <a:tcPr/>
+                </a:tc>
+                <a:tc>
+                  <a:txBody>
+                    <a:bodyPr/>
+                    <a:lstStyle/>
+                    <a:p>
+                      <a:r>
+                        <a:rPr sz="700"/>
+                        <a:t>$178.00</a:t>
+                      </a:r>
+                    </a:p>
+                  </a:txBody>
+                  <a:tcPr/>
+                </a:tc>
+              </a:tr>
+              <a:tr h="171081">
+                <a:tc>
+                  <a:txBody>
+                    <a:bodyPr/>
+                    <a:lstStyle/>
+                    <a:p>
+                      <a:r>
+                        <a:rPr sz="700"/>
+                        <a:t>10</a:t>
+                      </a:r>
+                    </a:p>
+                  </a:txBody>
+                  <a:tcPr/>
+                </a:tc>
+                <a:tc>
+                  <a:txBody>
+                    <a:bodyPr/>
+                    <a:lstStyle/>
+                    <a:p>
+                      <a:r>
+                        <a:rPr sz="700"/>
+                        <a:t>kb-agent-virtual-network-10</a:t>
+                      </a:r>
+                    </a:p>
+                  </a:txBody>
+                  <a:tcPr/>
+                </a:tc>
+                <a:tc>
+                  <a:txBody>
+                    <a:bodyPr/>
+                    <a:lstStyle/>
+                    <a:p>
+                      <a:r>
+                        <a:rPr sz="700"/>
+                        <a:t>Virtual Network</a:t>
+                      </a:r>
+                    </a:p>
+                  </a:txBody>
+                  <a:tcPr/>
+                </a:tc>
+                <a:tc>
+                  <a:txBody>
+                    <a:bodyPr/>
+                    <a:lstStyle/>
+                    <a:p>
+                      <a:r>
+                        <a:rPr sz="700"/>
+                        <a:t>West Europe</a:t>
+                      </a:r>
+                    </a:p>
+                  </a:txBody>
+                  <a:tcPr/>
+                </a:tc>
+                <a:tc>
+                  <a:txBody>
+                    <a:bodyPr/>
+                    <a:lstStyle/>
+                    <a:p>
+                      <a:r>
+                        <a:rPr sz="700"/>
+                        <a:t>Healthy</a:t>
+                      </a:r>
+                    </a:p>
+                  </a:txBody>
+                  <a:tcPr/>
+                </a:tc>
+                <a:tc>
+                  <a:txBody>
+                    <a:bodyPr/>
+                    <a:lstStyle/>
+                    <a:p>
+                      <a:r>
+                        <a:rPr sz="700"/>
+                        <a:t>$0.00</a:t>
+                      </a:r>
+                    </a:p>
+                  </a:txBody>
+                  <a:tcPr/>
+                </a:tc>
+              </a:tr>
+              <a:tr h="171081">
+                <a:tc>
+                  <a:txBody>
+                    <a:bodyPr/>
+                    <a:lstStyle/>
+                    <a:p>
+                      <a:r>
+                        <a:rPr sz="700"/>
+                        <a:t>11</a:t>
+                      </a:r>
+                    </a:p>
+                  </a:txBody>
+                  <a:tcPr/>
+                </a:tc>
+                <a:tc>
+                  <a:txBody>
+                    <a:bodyPr/>
+                    <a:lstStyle/>
+                    <a:p>
+                      <a:r>
+                        <a:rPr sz="700"/>
+                        <a:t>kb-agent-container-app-11</a:t>
+                      </a:r>
+                    </a:p>
+                  </a:txBody>
+                  <a:tcPr/>
+                </a:tc>
+                <a:tc>
+                  <a:txBody>
+                    <a:bodyPr/>
+                    <a:lstStyle/>
+                    <a:p>
+                      <a:r>
+                        <a:rPr sz="700"/>
+                        <a:t>Container App</a:t>
+                      </a:r>
+                    </a:p>
+                  </a:txBody>
+                  <a:tcPr/>
+                </a:tc>
+                <a:tc>
+                  <a:txBody>
+                    <a:bodyPr/>
+                    <a:lstStyle/>
+                    <a:p>
+                      <a:r>
+                        <a:rPr sz="700"/>
+                        <a:t>East US 2</a:t>
+                      </a:r>
+                    </a:p>
+                  </a:txBody>
+                  <a:tcPr/>
+                </a:tc>
+                <a:tc>
+                  <a:txBody>
+                    <a:bodyPr/>
+                    <a:lstStyle/>
+                    <a:p>
+                      <a:r>
+                        <a:rPr sz="700"/>
+                        <a:t>Running</a:t>
+                      </a:r>
+                    </a:p>
+                  </a:txBody>
+                  <a:tcPr/>
+                </a:tc>
+                <a:tc>
+                  <a:txBody>
+                    <a:bodyPr/>
+                    <a:lstStyle/>
+                    <a:p>
+                      <a:r>
+                        <a:rPr sz="700"/>
+                        <a:t>$45.00</a:t>
+                      </a:r>
+                    </a:p>
+                  </a:txBody>
+                  <a:tcPr/>
+                </a:tc>
+              </a:tr>
+              <a:tr h="171081">
+                <a:tc>
+                  <a:txBody>
+                    <a:bodyPr/>
+                    <a:lstStyle/>
+                    <a:p>
+                      <a:r>
+                        <a:rPr sz="700"/>
+                        <a:t>12</a:t>
+                      </a:r>
+                    </a:p>
+                  </a:txBody>
+                  <a:tcPr/>
+                </a:tc>
+                <a:tc>
+                  <a:txBody>
+                    <a:bodyPr/>
+                    <a:lstStyle/>
+                    <a:p>
+                      <a:r>
+                        <a:rPr sz="700"/>
+                        <a:t>kb-agent-cosmos-db-12</a:t>
+                      </a:r>
+                    </a:p>
+                  </a:txBody>
+                  <a:tcPr/>
+                </a:tc>
+                <a:tc>
+                  <a:txBody>
+                    <a:bodyPr/>
+                    <a:lstStyle/>
+                    <a:p>
+                      <a:r>
+                        <a:rPr sz="700"/>
+                        <a:t>Cosmos DB</a:t>
+                      </a:r>
+                    </a:p>
+                  </a:txBody>
+                  <a:tcPr/>
+                </a:tc>
+                <a:tc>
+                  <a:txBody>
+                    <a:bodyPr/>
+                    <a:lstStyle/>
+                    <a:p>
+                      <a:r>
+                        <a:rPr sz="700"/>
+                        <a:t>West US 3</a:t>
+                      </a:r>
+                    </a:p>
+                  </a:txBody>
+                  <a:tcPr/>
+                </a:tc>
+                <a:tc>
+                  <a:txBody>
+                    <a:bodyPr/>
+                    <a:lstStyle/>
+                    <a:p>
+                      <a:r>
+                        <a:rPr sz="700"/>
+                        <a:t>Provisioned</a:t>
+                      </a:r>
+                    </a:p>
+                  </a:txBody>
+                  <a:tcPr/>
+                </a:tc>
+                <a:tc>
+                  <a:txBody>
+                    <a:bodyPr/>
+                    <a:lstStyle/>
+                    <a:p>
+                      <a:r>
+                        <a:rPr sz="700"/>
+                        <a:t>$120.50</a:t>
+                      </a:r>
+                    </a:p>
+                  </a:txBody>
+                  <a:tcPr/>
+                </a:tc>
+              </a:tr>
+              <a:tr h="171081">
+                <a:tc>
+                  <a:txBody>
+                    <a:bodyPr/>
+                    <a:lstStyle/>
+                    <a:p>
+                      <a:r>
+                        <a:rPr sz="700"/>
+                        <a:t>13</a:t>
+                      </a:r>
+                    </a:p>
+                  </a:txBody>
+                  <a:tcPr/>
+                </a:tc>
+                <a:tc>
+                  <a:txBody>
+                    <a:bodyPr/>
+                    <a:lstStyle/>
+                    <a:p>
+                      <a:r>
+                        <a:rPr sz="700"/>
+                        <a:t>kb-agent-ai-search-13</a:t>
+                      </a:r>
+                    </a:p>
+                  </a:txBody>
+                  <a:tcPr/>
+                </a:tc>
+                <a:tc>
+                  <a:txBody>
+                    <a:bodyPr/>
+                    <a:lstStyle/>
+                    <a:p>
+                      <a:r>
+                        <a:rPr sz="700"/>
+                        <a:t>AI Search</a:t>
+                      </a:r>
+                    </a:p>
+                  </a:txBody>
+                  <a:tcPr/>
+                </a:tc>
+                <a:tc>
+                  <a:txBody>
+                    <a:bodyPr/>
+                    <a:lstStyle/>
+                    <a:p>
+                      <a:r>
+                        <a:rPr sz="700"/>
+                        <a:t>Central US</a:t>
+                      </a:r>
+                    </a:p>
+                  </a:txBody>
+                  <a:tcPr/>
+                </a:tc>
+                <a:tc>
+                  <a:txBody>
+                    <a:bodyPr/>
+                    <a:lstStyle/>
+                    <a:p>
+                      <a:r>
+                        <a:rPr sz="700"/>
+                        <a:t>Scaling</a:t>
+                      </a:r>
+                    </a:p>
+                  </a:txBody>
+                  <a:tcPr/>
+                </a:tc>
+                <a:tc>
+                  <a:txBody>
+                    <a:bodyPr/>
+                    <a:lstStyle/>
+                    <a:p>
+                      <a:r>
+                        <a:rPr sz="700"/>
+                        <a:t>$89.99</a:t>
+                      </a:r>
+                    </a:p>
+                  </a:txBody>
+                  <a:tcPr/>
+                </a:tc>
+              </a:tr>
+              <a:tr h="171081">
+                <a:tc>
+                  <a:txBody>
+                    <a:bodyPr/>
+                    <a:lstStyle/>
+                    <a:p>
+                      <a:r>
+                        <a:rPr sz="700"/>
+                        <a:t>14</a:t>
+                      </a:r>
+                    </a:p>
+                  </a:txBody>
+                  <a:tcPr/>
+                </a:tc>
+                <a:tc>
+                  <a:txBody>
+                    <a:bodyPr/>
+                    <a:lstStyle/>
+                    <a:p>
+                      <a:r>
+                        <a:rPr sz="700"/>
+                        <a:t>kb-agent-openai-14</a:t>
+                      </a:r>
+                    </a:p>
+                  </a:txBody>
+                  <a:tcPr/>
+                </a:tc>
+                <a:tc>
+                  <a:txBody>
+                    <a:bodyPr/>
+                    <a:lstStyle/>
+                    <a:p>
+                      <a:r>
+                        <a:rPr sz="700"/>
+                        <a:t>OpenAI</a:t>
+                      </a:r>
+                    </a:p>
+                  </a:txBody>
+                  <a:tcPr/>
+                </a:tc>
+                <a:tc>
+                  <a:txBody>
+                    <a:bodyPr/>
+                    <a:lstStyle/>
+                    <a:p>
+                      <a:r>
+                        <a:rPr sz="700"/>
+                        <a:t>North Europe</a:t>
+                      </a:r>
+                    </a:p>
+                  </a:txBody>
+                  <a:tcPr/>
+                </a:tc>
+                <a:tc>
+                  <a:txBody>
+                    <a:bodyPr/>
+                    <a:lstStyle/>
+                    <a:p>
+                      <a:r>
+                        <a:rPr sz="700"/>
+                        <a:t>Updating</a:t>
+                      </a:r>
+                    </a:p>
+                  </a:txBody>
+                  <a:tcPr/>
+                </a:tc>
+                <a:tc>
+                  <a:txBody>
+                    <a:bodyPr/>
+                    <a:lstStyle/>
+                    <a:p>
+                      <a:r>
+                        <a:rPr sz="700"/>
+                        <a:t>$210.00</a:t>
+                      </a:r>
+                    </a:p>
+                  </a:txBody>
+                  <a:tcPr/>
+                </a:tc>
+              </a:tr>
+              <a:tr h="171081">
+                <a:tc>
+                  <a:txBody>
+                    <a:bodyPr/>
+                    <a:lstStyle/>
+                    <a:p>
+                      <a:r>
+                        <a:rPr sz="700"/>
+                        <a:t>15</a:t>
+                      </a:r>
+                    </a:p>
+                  </a:txBody>
+                  <a:tcPr/>
+                </a:tc>
+                <a:tc>
+                  <a:txBody>
+                    <a:bodyPr/>
+                    <a:lstStyle/>
+                    <a:p>
+                      <a:r>
+                        <a:rPr sz="700"/>
+                        <a:t>kb-agent-blob-storage-15</a:t>
+                      </a:r>
+                    </a:p>
+                  </a:txBody>
+                  <a:tcPr/>
+                </a:tc>
+                <a:tc>
+                  <a:txBody>
+                    <a:bodyPr/>
+                    <a:lstStyle/>
+                    <a:p>
+                      <a:r>
+                        <a:rPr sz="700"/>
+                        <a:t>Blob Storage</a:t>
+                      </a:r>
+                    </a:p>
+                  </a:txBody>
+                  <a:tcPr/>
+                </a:tc>
+                <a:tc>
+                  <a:txBody>
+                    <a:bodyPr/>
+                    <a:lstStyle/>
+                    <a:p>
+                      <a:r>
+                        <a:rPr sz="700"/>
+                        <a:t>West Europe</a:t>
+                      </a:r>
+                    </a:p>
+                  </a:txBody>
+                  <a:tcPr/>
+                </a:tc>
+                <a:tc>
+                  <a:txBody>
+                    <a:bodyPr/>
+                    <a:lstStyle/>
+                    <a:p>
+                      <a:r>
+                        <a:rPr sz="700"/>
+                        <a:t>Healthy</a:t>
+                      </a:r>
+                    </a:p>
+                  </a:txBody>
+                  <a:tcPr/>
+                </a:tc>
+                <a:tc>
+                  <a:txBody>
+                    <a:bodyPr/>
+                    <a:lstStyle/>
+                    <a:p>
+                      <a:r>
+                        <a:rPr sz="700"/>
+                        <a:t>$15.75</a:t>
+                      </a:r>
+                    </a:p>
+                  </a:txBody>
+                  <a:tcPr/>
+                </a:tc>
+              </a:tr>
+              <a:tr h="171081">
+                <a:tc>
+                  <a:txBody>
+                    <a:bodyPr/>
+                    <a:lstStyle/>
+                    <a:p>
+                      <a:r>
+                        <a:rPr sz="700"/>
+                        <a:t>16</a:t>
+                      </a:r>
+                    </a:p>
+                  </a:txBody>
+                  <a:tcPr/>
+                </a:tc>
+                <a:tc>
+                  <a:txBody>
+                    <a:bodyPr/>
+                    <a:lstStyle/>
+                    <a:p>
+                      <a:r>
+                        <a:rPr sz="700"/>
+                        <a:t>kb-agent-key-vault-16</a:t>
+                      </a:r>
+                    </a:p>
+                  </a:txBody>
+                  <a:tcPr/>
+                </a:tc>
+                <a:tc>
+                  <a:txBody>
+                    <a:bodyPr/>
+                    <a:lstStyle/>
+                    <a:p>
+                      <a:r>
+                        <a:rPr sz="700"/>
+                        <a:t>Key Vault</a:t>
+                      </a:r>
+                    </a:p>
+                  </a:txBody>
+                  <a:tcPr/>
+                </a:tc>
+                <a:tc>
+                  <a:txBody>
+                    <a:bodyPr/>
+                    <a:lstStyle/>
+                    <a:p>
+                      <a:r>
+                        <a:rPr sz="700"/>
+                        <a:t>East US 2</a:t>
+                      </a:r>
+                    </a:p>
+                  </a:txBody>
+                  <a:tcPr/>
+                </a:tc>
+                <a:tc>
+                  <a:txBody>
+                    <a:bodyPr/>
+                    <a:lstStyle/>
+                    <a:p>
+                      <a:r>
+                        <a:rPr sz="700"/>
+                        <a:t>Running</a:t>
+                      </a:r>
+                    </a:p>
+                  </a:txBody>
+                  <a:tcPr/>
+                </a:tc>
+                <a:tc>
+                  <a:txBody>
+                    <a:bodyPr/>
+                    <a:lstStyle/>
+                    <a:p>
+                      <a:r>
+                        <a:rPr sz="700"/>
+                        <a:t>$32.40</a:t>
+                      </a:r>
+                    </a:p>
+                  </a:txBody>
+                  <a:tcPr/>
+                </a:tc>
+              </a:tr>
+              <a:tr h="171081">
+                <a:tc>
+                  <a:txBody>
+                    <a:bodyPr/>
+                    <a:lstStyle/>
+                    <a:p>
+                      <a:r>
+                        <a:rPr sz="700"/>
+                        <a:t>17</a:t>
+                      </a:r>
+                    </a:p>
+                  </a:txBody>
+                  <a:tcPr/>
+                </a:tc>
+                <a:tc>
+                  <a:txBody>
+                    <a:bodyPr/>
+                    <a:lstStyle/>
+                    <a:p>
+                      <a:r>
+                        <a:rPr sz="700"/>
+                        <a:t>kb-agent-app-insights-17</a:t>
+                      </a:r>
+                    </a:p>
+                  </a:txBody>
+                  <a:tcPr/>
+                </a:tc>
+                <a:tc>
+                  <a:txBody>
+                    <a:bodyPr/>
+                    <a:lstStyle/>
+                    <a:p>
+                      <a:r>
+                        <a:rPr sz="700"/>
+                        <a:t>App Insights</a:t>
+                      </a:r>
+                    </a:p>
+                  </a:txBody>
+                  <a:tcPr/>
+                </a:tc>
+                <a:tc>
+                  <a:txBody>
+                    <a:bodyPr/>
+                    <a:lstStyle/>
+                    <a:p>
+                      <a:r>
+                        <a:rPr sz="700"/>
+                        <a:t>West US 3</a:t>
+                      </a:r>
+                    </a:p>
+                  </a:txBody>
+                  <a:tcPr/>
+                </a:tc>
+                <a:tc>
+                  <a:txBody>
+                    <a:bodyPr/>
+                    <a:lstStyle/>
+                    <a:p>
+                      <a:r>
+                        <a:rPr sz="700"/>
+                        <a:t>Provisioned</a:t>
+                      </a:r>
+                    </a:p>
+                  </a:txBody>
+                  <a:tcPr/>
+                </a:tc>
+                <a:tc>
+                  <a:txBody>
+                    <a:bodyPr/>
+                    <a:lstStyle/>
+                    <a:p>
+                      <a:r>
+                        <a:rPr sz="700"/>
+                        <a:t>$8.50</a:t>
+                      </a:r>
+                    </a:p>
+                  </a:txBody>
+                  <a:tcPr/>
+                </a:tc>
+              </a:tr>
+              <a:tr h="171081">
+                <a:tc>
+                  <a:txBody>
+                    <a:bodyPr/>
+                    <a:lstStyle/>
+                    <a:p>
+                      <a:r>
+                        <a:rPr sz="700"/>
+                        <a:t>18</a:t>
+                      </a:r>
+                    </a:p>
+                  </a:txBody>
+                  <a:tcPr/>
+                </a:tc>
+                <a:tc>
+                  <a:txBody>
+                    <a:bodyPr/>
+                    <a:lstStyle/>
+                    <a:p>
+                      <a:r>
+                        <a:rPr sz="700"/>
+                        <a:t>kb-agent-log-analytics-18</a:t>
+                      </a:r>
+                    </a:p>
+                  </a:txBody>
+                  <a:tcPr/>
+                </a:tc>
+                <a:tc>
+                  <a:txBody>
+                    <a:bodyPr/>
+                    <a:lstStyle/>
+                    <a:p>
+                      <a:r>
+                        <a:rPr sz="700"/>
+                        <a:t>Log Analytics</a:t>
+                      </a:r>
+                    </a:p>
+                  </a:txBody>
+                  <a:tcPr/>
+                </a:tc>
+                <a:tc>
+                  <a:txBody>
+                    <a:bodyPr/>
+                    <a:lstStyle/>
+                    <a:p>
+                      <a:r>
+                        <a:rPr sz="700"/>
+                        <a:t>Central US</a:t>
+                      </a:r>
+                    </a:p>
+                  </a:txBody>
+                  <a:tcPr/>
+                </a:tc>
+                <a:tc>
+                  <a:txBody>
+                    <a:bodyPr/>
+                    <a:lstStyle/>
+                    <a:p>
+                      <a:r>
+                        <a:rPr sz="700"/>
+                        <a:t>Scaling</a:t>
+                      </a:r>
+                    </a:p>
+                  </a:txBody>
+                  <a:tcPr/>
+                </a:tc>
+                <a:tc>
+                  <a:txBody>
+                    <a:bodyPr/>
+                    <a:lstStyle/>
+                    <a:p>
+                      <a:r>
+                        <a:rPr sz="700"/>
+                        <a:t>$55.20</a:t>
+                      </a:r>
+                    </a:p>
+                  </a:txBody>
+                  <a:tcPr/>
+                </a:tc>
+              </a:tr>
+              <a:tr h="171081">
+                <a:tc>
+                  <a:txBody>
+                    <a:bodyPr/>
+                    <a:lstStyle/>
+                    <a:p>
+                      <a:r>
+                        <a:rPr sz="700"/>
+                        <a:t>19</a:t>
+                      </a:r>
+                    </a:p>
+                  </a:txBody>
+                  <a:tcPr/>
+                </a:tc>
+                <a:tc>
+                  <a:txBody>
+                    <a:bodyPr/>
+                    <a:lstStyle/>
+                    <a:p>
+                      <a:r>
+                        <a:rPr sz="700"/>
+                        <a:t>kb-agent-container-registry-19</a:t>
+                      </a:r>
+                    </a:p>
+                  </a:txBody>
+                  <a:tcPr/>
+                </a:tc>
+                <a:tc>
+                  <a:txBody>
+                    <a:bodyPr/>
+                    <a:lstStyle/>
+                    <a:p>
+                      <a:r>
+                        <a:rPr sz="700"/>
+                        <a:t>Container Registry</a:t>
+                      </a:r>
+                    </a:p>
+                  </a:txBody>
+                  <a:tcPr/>
+                </a:tc>
+                <a:tc>
+                  <a:txBody>
+                    <a:bodyPr/>
+                    <a:lstStyle/>
+                    <a:p>
+                      <a:r>
+                        <a:rPr sz="700"/>
+                        <a:t>North Europe</a:t>
+                      </a:r>
+                    </a:p>
+                  </a:txBody>
+                  <a:tcPr/>
+                </a:tc>
+                <a:tc>
+                  <a:txBody>
+                    <a:bodyPr/>
+                    <a:lstStyle/>
+                    <a:p>
+                      <a:r>
+                        <a:rPr sz="700"/>
+                        <a:t>Updating</a:t>
+                      </a:r>
+                    </a:p>
+                  </a:txBody>
+                  <a:tcPr/>
+                </a:tc>
+                <a:tc>
+                  <a:txBody>
+                    <a:bodyPr/>
+                    <a:lstStyle/>
+                    <a:p>
+                      <a:r>
+                        <a:rPr sz="700"/>
+                        <a:t>$178.00</a:t>
+                      </a:r>
+                    </a:p>
+                  </a:txBody>
+                  <a:tcPr/>
+                </a:tc>
+              </a:tr>
+              <a:tr h="171081">
+                <a:tc>
+                  <a:txBody>
+                    <a:bodyPr/>
+                    <a:lstStyle/>
+                    <a:p>
+                      <a:r>
+                        <a:rPr sz="700"/>
+                        <a:t>20</a:t>
+                      </a:r>
+                    </a:p>
+                  </a:txBody>
+                  <a:tcPr/>
+                </a:tc>
+                <a:tc>
+                  <a:txBody>
+                    <a:bodyPr/>
+                    <a:lstStyle/>
+                    <a:p>
+                      <a:r>
+                        <a:rPr sz="700"/>
+                        <a:t>kb-agent-virtual-network-20</a:t>
+                      </a:r>
+                    </a:p>
+                  </a:txBody>
+                  <a:tcPr/>
+                </a:tc>
+                <a:tc>
+                  <a:txBody>
+                    <a:bodyPr/>
+                    <a:lstStyle/>
+                    <a:p>
+                      <a:r>
+                        <a:rPr sz="700"/>
+                        <a:t>Virtual Network</a:t>
+                      </a:r>
+                    </a:p>
+                  </a:txBody>
+                  <a:tcPr/>
+                </a:tc>
+                <a:tc>
+                  <a:txBody>
+                    <a:bodyPr/>
+                    <a:lstStyle/>
+                    <a:p>
+                      <a:r>
+                        <a:rPr sz="700"/>
+                        <a:t>West Europe</a:t>
+                      </a:r>
+                    </a:p>
+                  </a:txBody>
+                  <a:tcPr/>
+                </a:tc>
+                <a:tc>
+                  <a:txBody>
+                    <a:bodyPr/>
+                    <a:lstStyle/>
+                    <a:p>
+                      <a:r>
+                        <a:rPr sz="700"/>
+                        <a:t>Healthy</a:t>
+                      </a:r>
+                    </a:p>
+                  </a:txBody>
+                  <a:tcPr/>
+                </a:tc>
+                <a:tc>
+                  <a:txBody>
+                    <a:bodyPr/>
+                    <a:lstStyle/>
+                    <a:p>
+                      <a:r>
+                        <a:rPr sz="700"/>
+                        <a:t>$0.00</a:t>
+                      </a:r>
+                    </a:p>
+                  </a:txBody>
+                  <a:tcPr/>
+                </a:tc>
+              </a:tr>
+              <a:tr h="171081">
+                <a:tc>
+                  <a:txBody>
+                    <a:bodyPr/>
+                    <a:lstStyle/>
+                    <a:p>
+                      <a:r>
+                        <a:rPr sz="700"/>
+                        <a:t>21</a:t>
+                      </a:r>
+                    </a:p>
+                  </a:txBody>
+                  <a:tcPr/>
+                </a:tc>
+                <a:tc>
+                  <a:txBody>
+                    <a:bodyPr/>
+                    <a:lstStyle/>
+                    <a:p>
+                      <a:r>
+                        <a:rPr sz="700"/>
+                        <a:t>kb-agent-container-app-21</a:t>
+                      </a:r>
+                    </a:p>
+                  </a:txBody>
+                  <a:tcPr/>
+                </a:tc>
+                <a:tc>
+                  <a:txBody>
+                    <a:bodyPr/>
+                    <a:lstStyle/>
+                    <a:p>
+                      <a:r>
+                        <a:rPr sz="700"/>
+                        <a:t>Container App</a:t>
+                      </a:r>
+                    </a:p>
+                  </a:txBody>
+                  <a:tcPr/>
+                </a:tc>
+                <a:tc>
+                  <a:txBody>
+                    <a:bodyPr/>
+                    <a:lstStyle/>
+                    <a:p>
+                      <a:r>
+                        <a:rPr sz="700"/>
+                        <a:t>East US 2</a:t>
+                      </a:r>
+                    </a:p>
+                  </a:txBody>
+                  <a:tcPr/>
+                </a:tc>
+                <a:tc>
+                  <a:txBody>
+                    <a:bodyPr/>
+                    <a:lstStyle/>
+                    <a:p>
+                      <a:r>
+                        <a:rPr sz="700"/>
+                        <a:t>Running</a:t>
+                      </a:r>
+                    </a:p>
+                  </a:txBody>
+                  <a:tcPr/>
+                </a:tc>
+                <a:tc>
+                  <a:txBody>
+                    <a:bodyPr/>
+                    <a:lstStyle/>
+                    <a:p>
+                      <a:r>
+                        <a:rPr sz="700"/>
+                        <a:t>$45.00</a:t>
+                      </a:r>
+                    </a:p>
+                  </a:txBody>
+                  <a:tcPr/>
+                </a:tc>
+              </a:tr>
+              <a:tr h="171081">
+                <a:tc>
+                  <a:txBody>
+                    <a:bodyPr/>
+                    <a:lstStyle/>
+                    <a:p>
+                      <a:r>
+                        <a:rPr sz="700"/>
+                        <a:t>22</a:t>
+                      </a:r>
+                    </a:p>
+                  </a:txBody>
+                  <a:tcPr/>
+                </a:tc>
+                <a:tc>
+                  <a:txBody>
+                    <a:bodyPr/>
+                    <a:lstStyle/>
+                    <a:p>
+                      <a:r>
+                        <a:rPr sz="700"/>
+                        <a:t>kb-agent-cosmos-db-22</a:t>
+                      </a:r>
+                    </a:p>
+                  </a:txBody>
+                  <a:tcPr/>
+                </a:tc>
+                <a:tc>
+                  <a:txBody>
+                    <a:bodyPr/>
+                    <a:lstStyle/>
+                    <a:p>
+                      <a:r>
+                        <a:rPr sz="700"/>
+                        <a:t>Cosmos DB</a:t>
+                      </a:r>
+                    </a:p>
+                  </a:txBody>
+                  <a:tcPr/>
+                </a:tc>
+                <a:tc>
+                  <a:txBody>
+                    <a:bodyPr/>
+                    <a:lstStyle/>
+                    <a:p>
+                      <a:r>
+                        <a:rPr sz="700"/>
+                        <a:t>West US 3</a:t>
+                      </a:r>
+                    </a:p>
+                  </a:txBody>
+                  <a:tcPr/>
+                </a:tc>
+                <a:tc>
+                  <a:txBody>
+                    <a:bodyPr/>
+                    <a:lstStyle/>
+                    <a:p>
+                      <a:r>
+                        <a:rPr sz="700"/>
+                        <a:t>Provisioned</a:t>
+                      </a:r>
+                    </a:p>
+                  </a:txBody>
+                  <a:tcPr/>
+                </a:tc>
+                <a:tc>
+                  <a:txBody>
+                    <a:bodyPr/>
+                    <a:lstStyle/>
+                    <a:p>
+                      <a:r>
+                        <a:rPr sz="700"/>
+                        <a:t>$120.50</a:t>
+                      </a:r>
+                    </a:p>
+                  </a:txBody>
+                  <a:tcPr/>
+                </a:tc>
+              </a:tr>
+              <a:tr h="171081">
+                <a:tc>
+                  <a:txBody>
+                    <a:bodyPr/>
+                    <a:lstStyle/>
+                    <a:p>
+                      <a:r>
+                        <a:rPr sz="700"/>
+                        <a:t>23</a:t>
+                      </a:r>
+                    </a:p>
+                  </a:txBody>
+                  <a:tcPr/>
+                </a:tc>
+                <a:tc>
+                  <a:txBody>
+                    <a:bodyPr/>
+                    <a:lstStyle/>
+                    <a:p>
+                      <a:r>
+                        <a:rPr sz="700"/>
+                        <a:t>kb-agent-ai-search-23</a:t>
+                      </a:r>
+                    </a:p>
+                  </a:txBody>
+                  <a:tcPr/>
+                </a:tc>
+                <a:tc>
+                  <a:txBody>
+                    <a:bodyPr/>
+                    <a:lstStyle/>
+                    <a:p>
+                      <a:r>
+                        <a:rPr sz="700"/>
+                        <a:t>AI Search</a:t>
+                      </a:r>
+                    </a:p>
+                  </a:txBody>
+                  <a:tcPr/>
+                </a:tc>
+                <a:tc>
+                  <a:txBody>
+                    <a:bodyPr/>
+                    <a:lstStyle/>
+                    <a:p>
+                      <a:r>
+                        <a:rPr sz="700"/>
+                        <a:t>Central US</a:t>
+                      </a:r>
+                    </a:p>
+                  </a:txBody>
+                  <a:tcPr/>
+                </a:tc>
+                <a:tc>
+                  <a:txBody>
+                    <a:bodyPr/>
+                    <a:lstStyle/>
+                    <a:p>
+                      <a:r>
+                        <a:rPr sz="700"/>
+                        <a:t>Scaling</a:t>
+                      </a:r>
+                    </a:p>
+                  </a:txBody>
+                  <a:tcPr/>
+                </a:tc>
+                <a:tc>
+                  <a:txBody>
+                    <a:bodyPr/>
+                    <a:lstStyle/>
+                    <a:p>
+                      <a:r>
+                        <a:rPr sz="700"/>
+                        <a:t>$89.99</a:t>
+                      </a:r>
+                    </a:p>
+                  </a:txBody>
+                  <a:tcPr/>
+                </a:tc>
+              </a:tr>
+              <a:tr h="171081">
+                <a:tc>
+                  <a:txBody>
+                    <a:bodyPr/>
+                    <a:lstStyle/>
+                    <a:p>
+                      <a:r>
+                        <a:rPr sz="700"/>
+                        <a:t>24</a:t>
+                      </a:r>
+                    </a:p>
+                  </a:txBody>
+                  <a:tcPr/>
+                </a:tc>
+                <a:tc>
+                  <a:txBody>
+                    <a:bodyPr/>
+                    <a:lstStyle/>
+                    <a:p>
+                      <a:r>
+                        <a:rPr sz="700"/>
+                        <a:t>kb-agent-openai-24</a:t>
+                      </a:r>
+                    </a:p>
+                  </a:txBody>
+                  <a:tcPr/>
+                </a:tc>
+                <a:tc>
+                  <a:txBody>
+                    <a:bodyPr/>
+                    <a:lstStyle/>
+                    <a:p>
+                      <a:r>
+                        <a:rPr sz="700"/>
+                        <a:t>OpenAI</a:t>
+                      </a:r>
+                    </a:p>
+                  </a:txBody>
+                  <a:tcPr/>
+                </a:tc>
+                <a:tc>
+                  <a:txBody>
+                    <a:bodyPr/>
+                    <a:lstStyle/>
+                    <a:p>
+                      <a:r>
+                        <a:rPr sz="700"/>
+                        <a:t>North Europe</a:t>
+                      </a:r>
+                    </a:p>
+                  </a:txBody>
+                  <a:tcPr/>
+                </a:tc>
+                <a:tc>
+                  <a:txBody>
+                    <a:bodyPr/>
+                    <a:lstStyle/>
+                    <a:p>
+                      <a:r>
+                        <a:rPr sz="700"/>
+                        <a:t>Updating</a:t>
+                      </a:r>
+                    </a:p>
+                  </a:txBody>
+                  <a:tcPr/>
+                </a:tc>
+                <a:tc>
+                  <a:txBody>
+                    <a:bodyPr/>
+                    <a:lstStyle/>
+                    <a:p>
+                      <a:r>
+                        <a:rPr sz="700"/>
+                        <a:t>$210.00</a:t>
+                      </a:r>
+                    </a:p>
+                  </a:txBody>
+                  <a:tcPr/>
+                </a:tc>
+              </a:tr>
+              <a:tr h="171081">
+                <a:tc>
+                  <a:txBody>
+                    <a:bodyPr/>
+                    <a:lstStyle/>
+                    <a:p>
+                      <a:r>
+                        <a:rPr sz="700"/>
+                        <a:t>25</a:t>
+                      </a:r>
+                    </a:p>
+                  </a:txBody>
+                  <a:tcPr/>
+                </a:tc>
+                <a:tc>
+                  <a:txBody>
+                    <a:bodyPr/>
+                    <a:lstStyle/>
+                    <a:p>
+                      <a:r>
+                        <a:rPr sz="700"/>
+                        <a:t>kb-agent-blob-storage-25</a:t>
+                      </a:r>
+                    </a:p>
+                  </a:txBody>
+                  <a:tcPr/>
+                </a:tc>
+                <a:tc>
+                  <a:txBody>
+                    <a:bodyPr/>
+                    <a:lstStyle/>
+                    <a:p>
+                      <a:r>
+                        <a:rPr sz="700"/>
+                        <a:t>Blob Storage</a:t>
+                      </a:r>
+                    </a:p>
+                  </a:txBody>
+                  <a:tcPr/>
+                </a:tc>
+                <a:tc>
+                  <a:txBody>
+                    <a:bodyPr/>
+                    <a:lstStyle/>
+                    <a:p>
+                      <a:r>
+                        <a:rPr sz="700"/>
+                        <a:t>West Europe</a:t>
+                      </a:r>
+                    </a:p>
+                  </a:txBody>
+                  <a:tcPr/>
+                </a:tc>
+                <a:tc>
+                  <a:txBody>
+                    <a:bodyPr/>
+                    <a:lstStyle/>
+                    <a:p>
+                      <a:r>
+                        <a:rPr sz="700"/>
+                        <a:t>Healthy</a:t>
+                      </a:r>
+                    </a:p>
+                  </a:txBody>
+                  <a:tcPr/>
+                </a:tc>
+                <a:tc>
+                  <a:txBody>
+                    <a:bodyPr/>
+                    <a:lstStyle/>
+                    <a:p>
+                      <a:r>
+                        <a:rPr sz="700"/>
+                        <a:t>$15.75</a:t>
+                      </a:r>
+                    </a:p>
+                  </a:txBody>
+                  <a:tcPr/>
+                </a:tc>
+              </a:tr>
+              <a:tr h="171081">
+                <a:tc>
+                  <a:txBody>
+                    <a:bodyPr/>
+                    <a:lstStyle/>
+                    <a:p>
+                      <a:r>
+                        <a:rPr sz="700"/>
+                        <a:t>26</a:t>
+                      </a:r>
+                    </a:p>
+                  </a:txBody>
+                  <a:tcPr/>
+                </a:tc>
+                <a:tc>
+                  <a:txBody>
+                    <a:bodyPr/>
+                    <a:lstStyle/>
+                    <a:p>
+                      <a:r>
+                        <a:rPr sz="700"/>
+                        <a:t>kb-agent-key-vault-26</a:t>
+                      </a:r>
+                    </a:p>
+                  </a:txBody>
+                  <a:tcPr/>
+                </a:tc>
+                <a:tc>
+                  <a:txBody>
+                    <a:bodyPr/>
+                    <a:lstStyle/>
+                    <a:p>
+                      <a:r>
+                        <a:rPr sz="700"/>
+                        <a:t>Key Vault</a:t>
+                      </a:r>
+                    </a:p>
+                  </a:txBody>
+                  <a:tcPr/>
+                </a:tc>
+                <a:tc>
+                  <a:txBody>
+                    <a:bodyPr/>
+                    <a:lstStyle/>
+                    <a:p>
+                      <a:r>
+                        <a:rPr sz="700"/>
+                        <a:t>East US 2</a:t>
+                      </a:r>
+                    </a:p>
+                  </a:txBody>
+                  <a:tcPr/>
+                </a:tc>
+                <a:tc>
+                  <a:txBody>
+                    <a:bodyPr/>
+                    <a:lstStyle/>
+                    <a:p>
+                      <a:r>
+                        <a:rPr sz="700"/>
+                        <a:t>Running</a:t>
+                      </a:r>
+                    </a:p>
+                  </a:txBody>
+                  <a:tcPr/>
+                </a:tc>
+                <a:tc>
+                  <a:txBody>
+                    <a:bodyPr/>
+                    <a:lstStyle/>
+                    <a:p>
+                      <a:r>
+                        <a:rPr sz="700"/>
+                        <a:t>$32.40</a:t>
+                      </a:r>
+                    </a:p>
+                  </a:txBody>
+                  <a:tcPr/>
+                </a:tc>
+              </a:tr>
+              <a:tr h="171081">
+                <a:tc>
+                  <a:txBody>
+                    <a:bodyPr/>
+                    <a:lstStyle/>
+                    <a:p>
+                      <a:r>
+                        <a:rPr sz="700"/>
+                        <a:t>27</a:t>
+                      </a:r>
+                    </a:p>
+                  </a:txBody>
+                  <a:tcPr/>
+                </a:tc>
+                <a:tc>
+                  <a:txBody>
+                    <a:bodyPr/>
+                    <a:lstStyle/>
+                    <a:p>
+                      <a:r>
+                        <a:rPr sz="700"/>
+                        <a:t>kb-agent-app-insights-27</a:t>
+                      </a:r>
+                    </a:p>
+                  </a:txBody>
+                  <a:tcPr/>
+                </a:tc>
+                <a:tc>
+                  <a:txBody>
+                    <a:bodyPr/>
+                    <a:lstStyle/>
+                    <a:p>
+                      <a:r>
+                        <a:rPr sz="700"/>
+                        <a:t>App Insights</a:t>
+                      </a:r>
+                    </a:p>
+                  </a:txBody>
+                  <a:tcPr/>
+                </a:tc>
+                <a:tc>
+                  <a:txBody>
+                    <a:bodyPr/>
+                    <a:lstStyle/>
+                    <a:p>
+                      <a:r>
+                        <a:rPr sz="700"/>
+                        <a:t>West US 3</a:t>
+                      </a:r>
+                    </a:p>
+                  </a:txBody>
+                  <a:tcPr/>
+                </a:tc>
+                <a:tc>
+                  <a:txBody>
+                    <a:bodyPr/>
+                    <a:lstStyle/>
+                    <a:p>
+                      <a:r>
+                        <a:rPr sz="700"/>
+                        <a:t>Provisioned</a:t>
+                      </a:r>
+                    </a:p>
+                  </a:txBody>
+                  <a:tcPr/>
+                </a:tc>
+                <a:tc>
+                  <a:txBody>
+                    <a:bodyPr/>
+                    <a:lstStyle/>
+                    <a:p>
+                      <a:r>
+                        <a:rPr sz="700"/>
+                        <a:t>$8.50</a:t>
+                      </a:r>
+                    </a:p>
+                  </a:txBody>
+                  <a:tcPr/>
+                </a:tc>
+              </a:tr>
+              <a:tr h="171081">
+                <a:tc>
+                  <a:txBody>
+                    <a:bodyPr/>
+                    <a:lstStyle/>
+                    <a:p>
+                      <a:r>
+                        <a:rPr sz="700"/>
+                        <a:t>28</a:t>
+                      </a:r>
+                    </a:p>
+                  </a:txBody>
+                  <a:tcPr/>
+                </a:tc>
+                <a:tc>
+                  <a:txBody>
+                    <a:bodyPr/>
+                    <a:lstStyle/>
+                    <a:p>
+                      <a:r>
+                        <a:rPr sz="700"/>
+                        <a:t>kb-agent-log-analytics-28</a:t>
+                      </a:r>
+                    </a:p>
+                  </a:txBody>
+                  <a:tcPr/>
+                </a:tc>
+                <a:tc>
+                  <a:txBody>
+                    <a:bodyPr/>
+                    <a:lstStyle/>
+                    <a:p>
+                      <a:r>
+                        <a:rPr sz="700"/>
+                        <a:t>Log Analytics</a:t>
+                      </a:r>
+                    </a:p>
+                  </a:txBody>
+                  <a:tcPr/>
+                </a:tc>
+                <a:tc>
+                  <a:txBody>
+                    <a:bodyPr/>
+                    <a:lstStyle/>
+                    <a:p>
+                      <a:r>
+                        <a:rPr sz="700"/>
+                        <a:t>Central US</a:t>
+                      </a:r>
+                    </a:p>
+                  </a:txBody>
+                  <a:tcPr/>
+                </a:tc>
+                <a:tc>
+                  <a:txBody>
+                    <a:bodyPr/>
+                    <a:lstStyle/>
+                    <a:p>
+                      <a:r>
+                        <a:rPr sz="700"/>
+                        <a:t>Scaling</a:t>
+                      </a:r>
+                    </a:p>
+                  </a:txBody>
+                  <a:tcPr/>
+                </a:tc>
+                <a:tc>
+                  <a:txBody>
+                    <a:bodyPr/>
+                    <a:lstStyle/>
+                    <a:p>
+                      <a:r>
+                        <a:rPr sz="700"/>
+                        <a:t>$55.20</a:t>
+                      </a:r>
+                    </a:p>
+                  </a:txBody>
+                  <a:tcPr/>
+                </a:tc>
+              </a:tr>
+              <a:tr h="171081">
+                <a:tc>
+                  <a:txBody>
+                    <a:bodyPr/>
+                    <a:lstStyle/>
+                    <a:p>
+                      <a:r>
+                        <a:rPr sz="700"/>
+                        <a:t>29</a:t>
+                      </a:r>
+                    </a:p>
+                  </a:txBody>
+                  <a:tcPr/>
+                </a:tc>
+                <a:tc>
+                  <a:txBody>
+                    <a:bodyPr/>
+                    <a:lstStyle/>
+                    <a:p>
+                      <a:r>
+                        <a:rPr sz="700"/>
+                        <a:t>kb-agent-container-registry-29</a:t>
+                      </a:r>
+                    </a:p>
+                  </a:txBody>
+                  <a:tcPr/>
+                </a:tc>
+                <a:tc>
+                  <a:txBody>
+                    <a:bodyPr/>
+                    <a:lstStyle/>
+                    <a:p>
+                      <a:r>
+                        <a:rPr sz="700"/>
+                        <a:t>Container Registry</a:t>
+                      </a:r>
+                    </a:p>
+                  </a:txBody>
+                  <a:tcPr/>
+                </a:tc>
+                <a:tc>
+                  <a:txBody>
+                    <a:bodyPr/>
+                    <a:lstStyle/>
+                    <a:p>
+                      <a:r>
+                        <a:rPr sz="700"/>
+                        <a:t>North Europe</a:t>
+                      </a:r>
+                    </a:p>
+                  </a:txBody>
+                  <a:tcPr/>
+                </a:tc>
+                <a:tc>
+                  <a:txBody>
+                    <a:bodyPr/>
+                    <a:lstStyle/>
+                    <a:p>
+                      <a:r>
+                        <a:rPr sz="700"/>
+                        <a:t>Updating</a:t>
+                      </a:r>
+                    </a:p>
+                  </a:txBody>
+                  <a:tcPr/>
+                </a:tc>
+                <a:tc>
+                  <a:txBody>
+                    <a:bodyPr/>
+                    <a:lstStyle/>
+                    <a:p>
+                      <a:r>
+                        <a:rPr sz="700"/>
+                        <a:t>$178.00</a:t>
+                      </a:r>
+                    </a:p>
+                  </a:txBody>
+                  <a:tcPr/>
+                </a:tc>
+              </a:tr>
+              <a:tr h="171090">
+                <a:tc>
+                  <a:txBody>
+                    <a:bodyPr/>
+                    <a:lstStyle/>
+                    <a:p>
+                      <a:r>
+                        <a:rPr sz="700"/>
+                        <a:t>30</a:t>
+                      </a:r>
+                    </a:p>
+                  </a:txBody>
+                  <a:tcPr/>
+                </a:tc>
+                <a:tc>
+                  <a:txBody>
+                    <a:bodyPr/>
+                    <a:lstStyle/>
+                    <a:p>
+                      <a:r>
+                        <a:rPr sz="700"/>
+                        <a:t>kb-agent-virtual-network-30</a:t>
+                      </a:r>
+                    </a:p>
+                  </a:txBody>
+                  <a:tcPr/>
+                </a:tc>
+                <a:tc>
+                  <a:txBody>
+                    <a:bodyPr/>
+                    <a:lstStyle/>
+                    <a:p>
+                      <a:r>
+                        <a:rPr sz="700"/>
+                        <a:t>Virtual Network</a:t>
+                      </a:r>
+                    </a:p>
+                  </a:txBody>
+                  <a:tcPr/>
+                </a:tc>
+                <a:tc>
+                  <a:txBody>
+                    <a:bodyPr/>
+                    <a:lstStyle/>
+                    <a:p>
+                      <a:r>
+                        <a:rPr sz="700"/>
+                        <a:t>West Europe</a:t>
+                      </a:r>
+                    </a:p>
+                  </a:txBody>
+                  <a:tcPr/>
+                </a:tc>
+                <a:tc>
+                  <a:txBody>
+                    <a:bodyPr/>
+                    <a:lstStyle/>
+                    <a:p>
+                      <a:r>
+                        <a:rPr sz="700"/>
+                        <a:t>Healthy</a:t>
+                      </a:r>
+                    </a:p>
+                  </a:txBody>
+                  <a:tcPr/>
+                </a:tc>
+                <a:tc>
+                  <a:txBody>
+                    <a:bodyPr/>
+                    <a:lstStyle/>
+                    <a:p>
+                      <a:r>
+                        <a:rPr sz="700"/>
+                        <a:t>$0.00</a:t>
+                      </a:r>
+                    </a:p>
+                  </a:txBody>
+                  <a:tcPr/>
+                </a:tc>
+              </a:tr>
+            </a:tbl>
+          </a:graphicData>
+        </a:graphic>
+      </p:graphicFrame>
+    </p:spTree>
+  </p:cSld>
+  <p:clrMapOvr>
+    <a:masterClrMapping/>
+  </p:clrMapOvr>
+</p:sld>
+</file>
+
+<file path=ppt/slides/slide8.xml><?xml version="1.0" encoding="utf-8"?>
+<p:sld xmlns:a="http://schemas.openxmlformats.org/drawingml/2006/main" xmlns:p="http://schemas.openxmlformats.org/presentationml/2006/main" xmlns:r="http://schemas.openxmlformats.org/officeDocument/2006/relationships">
+  <p:cSld>
+    <p:spTree>
+      <p:nvGrpSpPr>
+        <p:cNvPr id="1" name=""/>
+        <p:cNvGrpSpPr/>
+        <p:nvPr/>
+      </p:nvGrpSpPr>
+      <p:grpSpPr/>
+      <p:sp>
+        <p:nvSpPr>
+          <p:cNvPr id="2" name="Title 1"/>
+          <p:cNvSpPr>
+            <a:spLocks noGrp="1"/>
+          </p:cNvSpPr>
+          <p:nvPr>
+            <p:ph type="title"/>
+          </p:nvPr>
+        </p:nvSpPr>
+        <p:spPr/>
+        <p:txBody>
+          <a:bodyPr/>
+          <a:lstStyle/>
+          <a:p>
+            <a:r>
+              <a:t>References &amp; Links</a:t>
+            </a:r>
+          </a:p>
+        </p:txBody>
+      </p:sp>
+      <p:sp>
+        <p:nvSpPr>
+          <p:cNvPr id="3" name="Content Placeholder 2"/>
+          <p:cNvSpPr>
+            <a:spLocks noGrp="1"/>
+          </p:cNvSpPr>
+          <p:nvPr>
+            <p:ph idx="1"/>
+          </p:nvPr>
+        </p:nvSpPr>
+        <p:spPr/>
+        <p:txBody>
+          <a:bodyPr/>
+          <a:lstStyle/>
+          <a:p>
+            <a:r>
+              <a:t>Key Resources</a:t>
+            </a:r>
+          </a:p>
+          <a:p>
+            <a:pPr lvl="1"/>
+            <a:r>
+              <a:rPr>
+                <a:hlinkClick r:id="rId2"/>
+              </a:rPr>
+              <a:t>Azure AI Search documentation</a:t>
+            </a:r>
+          </a:p>
+          <a:p>
+            <a:pPr lvl="1"/>
+            <a:r>
+              <a:rPr>
+                <a:hlinkClick r:id="rId3"/>
+              </a:rPr>
+              <a:t>Azure OpenAI Service</a:t>
+            </a:r>
+          </a:p>
+          <a:p>
+            <a:pPr lvl="1"/>
+            <a:r>
+              <a:rPr>
+                <a:hlinkClick r:id="rId4"/>
+              </a:rPr>
+              <a:t>MarkItDown on GitHub</a:t>
+            </a:r>
+          </a:p>
+          <a:p>
+            <a:pPr lvl="1"/>
+            <a:r>
+              <a:rPr>
+                <a:hlinkClick r:id="rId5"/>
+              </a:rPr>
+              <a:t>Azure Container Apps</a:t>
+            </a:r>
+          </a:p>
+          <a:p>
+            <a:pPr lvl="1"/>
+            <a:r>
+              <a:rPr>
+                <a:hlinkClick r:id="rId6"/>
+              </a:rPr>
+              <a:t>Bicep documentation</a:t>
+            </a:r>
+          </a:p>
+        </p:txBody>
+      </p:sp>
     </p:spTree>
   </p:cSld>
   <p:clrMapOvr>
